--- a/docs/malaysia/IM말레이시아_입학안내문_2027.pptx
+++ b/docs/malaysia/IM말레이시아_입학안내문_2027.pptx
@@ -5746,7 +5746,7 @@
                           <a:ea typeface="맑은 고딕" pitchFamily="34" charset="-122"/>
                           <a:cs typeface="맑은 고딕" pitchFamily="34" charset="-120"/>
                         </a:rPr>
-                        <a:t>파운데이션 학비</a:t>
+                        <a:t>파운데이션 학비 (1년 총액)</a:t>
                       </a:r>
                       <a:endParaRPr lang="en-US" sz="1100" dirty="0">
                         <a:latin typeface="맑은 고딕" charset="0"/>
@@ -5814,7 +5814,7 @@
                           <a:ea typeface="맑은 고딕" pitchFamily="34" charset="-122"/>
                           <a:cs typeface="맑은 고딕" pitchFamily="34" charset="-120"/>
                         </a:rPr>
-                        <a:t>약 970만~2,330만 원</a:t>
+                        <a:t>약 1,490만 원</a:t>
                       </a:r>
                       <a:endParaRPr lang="en-US" sz="1100" dirty="0">
                         <a:latin typeface="맑은 고딕" charset="0"/>
@@ -29720,7 +29720,7 @@
                         <a:buNone/>
                       </a:pPr>
                       <a:r>
-                        <a:rPr lang="en-US" sz="1000" dirty="0">
+                        <a:rPr lang="en-US" sz="1000" b="1" dirty="0">
                           <a:solidFill>
                             <a:srgbClr val="1B2A44"/>
                           </a:solidFill>
@@ -29728,7 +29728,7 @@
                           <a:ea typeface="맑은 고딕" pitchFamily="34" charset="-122"/>
                           <a:cs typeface="맑은 고딕" pitchFamily="34" charset="-120"/>
                         </a:rPr>
-                        <a:t>28,600~68,590</a:t>
+                        <a:t>44,044</a:t>
                       </a:r>
                       <a:endParaRPr lang="en-US" sz="1000" dirty="0">
                         <a:latin typeface="맑은 고딕" charset="0"/>
@@ -29785,7 +29785,7 @@
                         <a:buNone/>
                       </a:pPr>
                       <a:r>
-                        <a:rPr lang="en-US" sz="1000" dirty="0">
+                        <a:rPr lang="en-US" sz="1000" b="1" dirty="0">
                           <a:solidFill>
                             <a:srgbClr val="1B2A44"/>
                           </a:solidFill>
@@ -29793,7 +29793,7 @@
                           <a:ea typeface="맑은 고딕" pitchFamily="34" charset="-122"/>
                           <a:cs typeface="맑은 고딕" pitchFamily="34" charset="-120"/>
                         </a:rPr>
-                        <a:t>970만~2,330만</a:t>
+                        <a:t>약 1,490만</a:t>
                       </a:r>
                       <a:endParaRPr lang="en-US" sz="1000" dirty="0">
                         <a:latin typeface="맑은 고딕" charset="0"/>
@@ -30979,8 +30979,8 @@
         </p:nvSpPr>
         <p:spPr>
           <a:xfrm>
-            <a:off x="566928" y="4407408"/>
-            <a:ext cx="5577840" cy="256032"/>
+            <a:off x="566928" y="4389120"/>
+            <a:ext cx="5577840" cy="237744"/>
           </a:xfrm>
           <a:prstGeom prst="rect">
             <a:avLst/>
@@ -31004,7 +31004,7 @@
                 <a:ea typeface="맑은 고딕" pitchFamily="34" charset="-122"/>
                 <a:cs typeface="맑은 고딕" pitchFamily="34" charset="-120"/>
               </a:rPr>
-              <a:t>6% 서비스세(SST) 별도 · 의약 계열이 상단값에 해당</a:t>
+              <a:t>6% SST 별도 · 학사 상단값(RM 446,690)은 의약 계열</a:t>
             </a:r>
             <a:endParaRPr lang="en-US" sz="950" dirty="0"/>
           </a:p>
@@ -31012,7 +31012,142 @@
       </p:sp>
       <p:sp>
         <p:nvSpPr>
-          <p:cNvPr id="9" name="Text 6"/>
+          <p:cNvPr id="9" name="Shape 6"/>
+          <p:cNvSpPr/>
+          <p:nvPr/>
+        </p:nvSpPr>
+        <p:spPr>
+          <a:xfrm>
+            <a:off x="566928" y="4681728"/>
+            <a:ext cx="5577840" cy="1298448"/>
+          </a:xfrm>
+          <a:prstGeom prst="roundRect">
+            <a:avLst>
+              <a:gd name="adj" fmla="val 3521"/>
+            </a:avLst>
+          </a:prstGeom>
+          <a:solidFill>
+            <a:srgbClr val="FDF0EC"/>
+          </a:solidFill>
+          <a:ln w="12700">
+            <a:solidFill>
+              <a:srgbClr val="E85D1F"/>
+            </a:solidFill>
+            <a:prstDash val="solid"/>
+          </a:ln>
+          <a:effectLst>
+            <a:outerShdw sx="100000" sy="100000" kx="0" ky="0" algn="bl" rotWithShape="0" blurRad="127000" dist="25400" dir="5400000">
+              <a:srgbClr val="0A2A5E">
+                <a:alpha val="10000"/>
+              </a:srgbClr>
+            </a:outerShdw>
+          </a:effectLst>
+        </p:spPr>
+      </p:sp>
+      <p:sp>
+        <p:nvSpPr>
+          <p:cNvPr id="10" name="Text 7"/>
+          <p:cNvSpPr txBox="1"/>
+          <p:nvPr/>
+        </p:nvSpPr>
+        <p:spPr>
+          <a:xfrm>
+            <a:off x="768096" y="4773168"/>
+            <a:ext cx="5212080" cy="256032"/>
+          </a:xfrm>
+          <a:prstGeom prst="rect">
+            <a:avLst/>
+          </a:prstGeom>
+          <a:noFill/>
+          <a:ln/>
+        </p:spPr>
+        <p:txBody>
+          <a:bodyPr wrap="square" lIns="0" tIns="0" rIns="0" bIns="0" rtlCol="0" anchor="ctr"/>
+          <a:lstStyle/>
+          <a:p>
+            <a:pPr indent="0" marL="0">
+              <a:buNone/>
+            </a:pPr>
+            <a:r>
+              <a:rPr lang="en-US" sz="1150" b="1" dirty="0">
+                <a:solidFill>
+                  <a:srgbClr val="A63C13"/>
+                </a:solidFill>
+                <a:latin typeface="맑은 고딕" pitchFamily="34" charset="0"/>
+                <a:ea typeface="맑은 고딕" pitchFamily="34" charset="-122"/>
+                <a:cs typeface="맑은 고딕" pitchFamily="34" charset="-120"/>
+              </a:rPr>
+              <a:t>파운데이션 학비 주의</a:t>
+            </a:r>
+            <a:endParaRPr lang="en-US" sz="1150" dirty="0"/>
+          </a:p>
+        </p:txBody>
+      </p:sp>
+      <p:sp>
+        <p:nvSpPr>
+          <p:cNvPr id="11" name="Text 8"/>
+          <p:cNvSpPr txBox="1"/>
+          <p:nvPr/>
+        </p:nvSpPr>
+        <p:spPr>
+          <a:xfrm>
+            <a:off x="768096" y="5029200"/>
+            <a:ext cx="5212080" cy="877824"/>
+          </a:xfrm>
+          <a:prstGeom prst="rect">
+            <a:avLst/>
+          </a:prstGeom>
+          <a:noFill/>
+          <a:ln/>
+        </p:spPr>
+        <p:txBody>
+          <a:bodyPr wrap="square" lIns="0" tIns="0" rIns="0" bIns="0" rtlCol="0" anchor="ctr"/>
+          <a:lstStyle/>
+          <a:p>
+            <a:pPr indent="0" marL="0">
+              <a:lnSpc>
+                <a:spcPts val="1300"/>
+              </a:lnSpc>
+              <a:buNone/>
+            </a:pPr>
+            <a:r>
+              <a:rPr lang="en-US" sz="950" dirty="0">
+                <a:solidFill>
+                  <a:srgbClr val="7A2E12"/>
+                </a:solidFill>
+                <a:latin typeface="맑은 고딕" pitchFamily="34" charset="0"/>
+                <a:ea typeface="맑은 고딕" pitchFamily="34" charset="-122"/>
+                <a:cs typeface="맑은 고딕" pitchFamily="34" charset="-120"/>
+              </a:rPr>
+              <a:t>유학 정보 사이트의 "RM 28,600~68,590"은 파운데이션이 아니라 국제 프리유니버시티(A Level · SACE, 18~24개월)를 합친 범위입니다.</a:t>
+            </a:r>
+            <a:endParaRPr lang="en-US" sz="950" dirty="0"/>
+          </a:p>
+          <a:p>
+            <a:pPr indent="0" marL="0">
+              <a:lnSpc>
+                <a:spcPts val="1300"/>
+              </a:lnSpc>
+              <a:buNone/>
+            </a:pPr>
+            <a:r>
+              <a:rPr lang="en-US" sz="950" dirty="0">
+                <a:solidFill>
+                  <a:srgbClr val="7A2E12"/>
+                </a:solidFill>
+                <a:latin typeface="맑은 고딕" pitchFamily="34" charset="0"/>
+                <a:ea typeface="맑은 고딕" pitchFamily="34" charset="-122"/>
+                <a:cs typeface="맑은 고딕" pitchFamily="34" charset="-120"/>
+              </a:rPr>
+              <a:t>테일러스에는 의대 파운데이션이 따로 없고 의학·약학도 FIS로 진학하므로 전공별 편차가 크지 않습니다.</a:t>
+            </a:r>
+            <a:endParaRPr lang="en-US" sz="950" dirty="0"/>
+          </a:p>
+        </p:txBody>
+      </p:sp>
+      <p:sp>
+        <p:nvSpPr>
+          <p:cNvPr id="12" name="Text 9"/>
           <p:cNvSpPr txBox="1"/>
           <p:nvPr/>
         </p:nvSpPr>
@@ -31051,7 +31186,7 @@
       </p:sp>
       <p:sp>
         <p:nvSpPr>
-          <p:cNvPr id="10" name="Shape 7"/>
+          <p:cNvPr id="13" name="Shape 10"/>
           <p:cNvSpPr/>
           <p:nvPr/>
         </p:nvSpPr>
@@ -31085,7 +31220,7 @@
       </p:sp>
       <p:sp>
         <p:nvSpPr>
-          <p:cNvPr id="11" name="Text 8"/>
+          <p:cNvPr id="14" name="Text 11"/>
           <p:cNvSpPr txBox="1"/>
           <p:nvPr/>
         </p:nvSpPr>
@@ -31124,7 +31259,7 @@
       </p:sp>
       <p:sp>
         <p:nvSpPr>
-          <p:cNvPr id="12" name="Text 9"/>
+          <p:cNvPr id="15" name="Text 12"/>
           <p:cNvSpPr txBox="1"/>
           <p:nvPr/>
         </p:nvSpPr>
@@ -31186,7 +31321,7 @@
       </p:sp>
       <p:sp>
         <p:nvSpPr>
-          <p:cNvPr id="13" name="Shape 10"/>
+          <p:cNvPr id="16" name="Shape 13"/>
           <p:cNvSpPr/>
           <p:nvPr/>
         </p:nvSpPr>
@@ -31220,7 +31355,7 @@
       </p:sp>
       <p:sp>
         <p:nvSpPr>
-          <p:cNvPr id="14" name="Text 11"/>
+          <p:cNvPr id="17" name="Text 14"/>
           <p:cNvSpPr txBox="1"/>
           <p:nvPr/>
         </p:nvSpPr>
@@ -31259,7 +31394,7 @@
       </p:sp>
       <p:sp>
         <p:nvSpPr>
-          <p:cNvPr id="15" name="Text 12"/>
+          <p:cNvPr id="18" name="Text 15"/>
           <p:cNvSpPr txBox="1"/>
           <p:nvPr/>
         </p:nvSpPr>
@@ -31321,7 +31456,7 @@
       </p:sp>
       <p:sp>
         <p:nvSpPr>
-          <p:cNvPr id="16" name="Shape 13"/>
+          <p:cNvPr id="19" name="Shape 16"/>
           <p:cNvSpPr/>
           <p:nvPr/>
         </p:nvSpPr>
@@ -31355,7 +31490,7 @@
       </p:sp>
       <p:sp>
         <p:nvSpPr>
-          <p:cNvPr id="17" name="Text 14"/>
+          <p:cNvPr id="20" name="Text 17"/>
           <p:cNvSpPr txBox="1"/>
           <p:nvPr/>
         </p:nvSpPr>
@@ -31394,7 +31529,7 @@
       </p:sp>
       <p:sp>
         <p:nvSpPr>
-          <p:cNvPr id="18" name="Text 15"/>
+          <p:cNvPr id="21" name="Text 18"/>
           <p:cNvSpPr txBox="1"/>
           <p:nvPr/>
         </p:nvSpPr>
